--- a/decks/geog-rivers/geog-rivers_ch5_why-rivers-flood.pptx
+++ b/decks/geog-rivers/geog-rivers_ch5_why-rivers-flood.pptx
@@ -126,30 +126,30 @@
   <p:extLst>
     <p:ext uri="{521415D9-36F7-43E2-AB2F-B90AF26B5E84}">
       <p14:sectionLst xmlns:p14="http://schemas.microsoft.com/office/powerpoint/2010/main">
-        <p14:section name="Opening" id="{a609c98d-17e2-0a94-8a52-d2bf89df1953}">
+        <p14:section name="Opening" id="{b5ba9ae9-4e11-0f05-142f-fdbe4343a665}">
           <p14:sldIdLst>
             <p14:sldId id="256"/>
           </p14:sldIdLst>
         </p14:section>
-        <p14:section name="Gate" id="{b1269ec4-036a-d0f8-4336-8ac99a4fda8c}">
+        <p14:section name="Gate" id="{644a4593-7da0-52a4-7f9e-9856df0665c1}">
           <p14:sldIdLst>
             <p14:sldId id="257"/>
             <p14:sldId id="258"/>
           </p14:sldIdLst>
         </p14:section>
-        <p14:section name="Pre-teach" id="{3e0cebec-76d9-8734-989b-86d7b8f9e099}">
+        <p14:section name="Pre-teach" id="{0eac8ed8-6e33-288e-c00f-33f1eb3a32de}">
           <p14:sldIdLst>
             <p14:sldId id="259"/>
             <p14:sldId id="260"/>
           </p14:sldIdLst>
         </p14:section>
-        <p14:section name="Read-along" id="{884f49e0-6fb0-5505-f4c2-251f685fe0cd}">
+        <p14:section name="Read-along" id="{2cb51c84-990f-6f77-0805-d4223d90311f}">
           <p14:sldIdLst>
             <p14:sldId id="261"/>
             <p14:sldId id="262"/>
           </p14:sldIdLst>
         </p14:section>
-        <p14:section name="Teach" id="{a6d7512e-7940-4642-bd85-332a15e02d1c}">
+        <p14:section name="Teach" id="{0491a821-02d4-0232-7d63-b153df3da27f}">
           <p14:sldIdLst>
             <p14:sldId id="263"/>
             <p14:sldId id="264"/>
@@ -158,7 +158,7 @@
             <p14:sldId id="267"/>
           </p14:sldIdLst>
         </p14:section>
-        <p14:section name="Routes" id="{d9279cfd-8582-4b77-c3d8-6fb11103a82d}">
+        <p14:section name="Routes" id="{3b5c18d1-abeb-f152-e976-7e11844284da}">
           <p14:sldIdLst>
             <p14:sldId id="268"/>
             <p14:sldId id="269"/>
@@ -166,12 +166,12 @@
             <p14:sldId id="271"/>
           </p14:sldIdLst>
         </p14:section>
-        <p14:section name="Close" id="{2a4dca89-a63d-9f3d-5774-34453ddb01dd}">
+        <p14:section name="Close" id="{43f63d59-c11a-f299-886a-a8f8295a853b}">
           <p14:sldIdLst>
             <p14:sldId id="272"/>
           </p14:sldIdLst>
         </p14:section>
-        <p14:section name="Answers" id="{ab233bde-5449-1de5-6066-7a4ba905e5ee}">
+        <p14:section name="Answers" id="{4471b309-6e85-2444-ecf6-464eca6c8f89}">
           <p14:sldIdLst>
             <p14:sldId id="273"/>
             <p14:sldId id="274"/>
@@ -1510,7 +1510,7 @@
             <a:r>
               <a:rPr lang="en-US" dirty="0"/>
               <a:t>Answers — task 2: Cause or effect?. Reveal the answer; pupils mark their own work in a different colour, then read the "why" together. Same destination for every lane, so one answer serves the whole class.
-Answer: A   A physical cause of the flood
+Answer: C   A physical cause of the flood
 Why: Causes come before the flood and are physical (nature) or human (people). Effects come after and are social, economic or environmental.
 Ask a Support pupil to explain one step, and a Stretch pupil to share their extension.</a:t>
             </a:r>
@@ -1602,7 +1602,7 @@
               <a:rPr lang="en-US" dirty="0"/>
               <a:t>Do now — retrieval. Silent, no notes, no help: recall comes before any support. Give about four minutes.
 1. A flood happens when a river has more water than its ___ can hold.  →  channel
-2. Which of these is a HUMAN factor that increases the risk of flooding?  →  A   Cutting down trees
+2. Which of these is a HUMAN factor that increases the risk of flooding?  →  B   Cutting down trees
 3. In 1998, flood water covered about 80% of Bangladesh. What percentage of the country was NOT under water?  →  20 %
 Circulate: who gets 3/3 (Stretch route), 2/3 (Core), 0–1 (Support)? Use this to route pupils later in the lesson.</a:t>
             </a:r>
@@ -1785,7 +1785,7 @@
               <a:rPr lang="en-US" dirty="0"/>
               <a:t>Answers — pupils mark their own in a different colour, then hands up for 3/3, 2/3, 1/3.
 1. channel. The channel is the river's normal pathway; when it is too full, water spills onto the floodplain.
-2. A   Cutting down trees. Deforestation is done by people; it removes trees that would soak up and slow down rain.
+2. B   Cutting down trees. Deforestation is done by people; it removes trees that would soak up and slow down rain.
 3. 20 %. The whole country is 100%, so 100 − 80 = 20% stayed dry.
 Say the route each score points to: 3/3 Stretch, 2/3 Core, 0–1 Support. Pupils may choose to move up.</a:t>
             </a:r>
@@ -7950,7 +7950,7 @@
                 <a:ea typeface="Calibri" pitchFamily="34" charset="-122"/>
                 <a:cs typeface="Calibri" pitchFamily="34" charset="-120"/>
               </a:rPr>
-              <a:t>A physical cause of the flood</a:t>
+              <a:t>An economic effect of the flood</a:t>
             </a:r>
             <a:endParaRPr lang="en-US" sz="2600" dirty="0"/>
           </a:p>
@@ -8024,7 +8024,7 @@
                 <a:ea typeface="Calibri" pitchFamily="34" charset="-122"/>
                 <a:cs typeface="Calibri" pitchFamily="34" charset="-120"/>
               </a:rPr>
-              <a:t>A social effect of the flood</a:t>
+              <a:t>A physical cause of the flood</a:t>
             </a:r>
             <a:endParaRPr lang="en-US" sz="2600" dirty="0"/>
           </a:p>
@@ -8061,7 +8061,7 @@
                 <a:ea typeface="Calibri" pitchFamily="34" charset="-122"/>
                 <a:cs typeface="Calibri" pitchFamily="34" charset="-120"/>
               </a:rPr>
-              <a:t>An economic effect of the flood</a:t>
+              <a:t>A social effect of the flood</a:t>
             </a:r>
             <a:endParaRPr lang="en-US" sz="2600" dirty="0"/>
           </a:p>
@@ -10505,7 +10505,7 @@
                 <a:ea typeface="Cambria" pitchFamily="34" charset="-122"/>
                 <a:cs typeface="Cambria" pitchFamily="34" charset="-120"/>
               </a:rPr>
-              <a:t>A   A physical cause of the flood</a:t>
+              <a:t>C   A physical cause of the flood</a:t>
             </a:r>
             <a:endParaRPr lang="en-US" sz="1800" dirty="0"/>
           </a:p>
@@ -11237,7 +11237,7 @@
                 <a:ea typeface="Calibri" pitchFamily="34" charset="-122"/>
                 <a:cs typeface="Calibri" pitchFamily="34" charset="-120"/>
               </a:rPr>
-              <a:t>Cutting down trees</a:t>
+              <a:t>Steep slopes</a:t>
             </a:r>
             <a:endParaRPr lang="en-US" sz="2200" dirty="0"/>
           </a:p>
@@ -11274,7 +11274,7 @@
                 <a:ea typeface="Calibri" pitchFamily="34" charset="-122"/>
                 <a:cs typeface="Calibri" pitchFamily="34" charset="-120"/>
               </a:rPr>
-              <a:t>Heavy rain for several days</a:t>
+              <a:t>Cutting down trees</a:t>
             </a:r>
             <a:endParaRPr lang="en-US" sz="2200" dirty="0"/>
           </a:p>
@@ -11311,7 +11311,7 @@
                 <a:ea typeface="Calibri" pitchFamily="34" charset="-122"/>
                 <a:cs typeface="Calibri" pitchFamily="34" charset="-120"/>
               </a:rPr>
-              <a:t>Steep slopes</a:t>
+              <a:t>Snow melting in spring</a:t>
             </a:r>
             <a:endParaRPr lang="en-US" sz="2200" dirty="0"/>
           </a:p>
@@ -11348,7 +11348,7 @@
                 <a:ea typeface="Calibri" pitchFamily="34" charset="-122"/>
                 <a:cs typeface="Calibri" pitchFamily="34" charset="-120"/>
               </a:rPr>
-              <a:t>Snow melting in spring</a:t>
+              <a:t>Heavy rain for several days</a:t>
             </a:r>
             <a:endParaRPr lang="en-US" sz="2200" dirty="0"/>
           </a:p>
@@ -12656,7 +12656,7 @@
                 <a:ea typeface="Calibri" pitchFamily="34" charset="-122"/>
                 <a:cs typeface="Calibri" pitchFamily="34" charset="-120"/>
               </a:rPr>
-              <a:t>A   Cutting down trees</a:t>
+              <a:t>B   Cutting down trees</a:t>
             </a:r>
             <a:endParaRPr lang="en-US" sz="2200" dirty="0"/>
           </a:p>

--- a/decks/geog-rivers/geog-rivers_ch5_why-rivers-flood.pptx
+++ b/decks/geog-rivers/geog-rivers_ch5_why-rivers-flood.pptx
@@ -126,30 +126,30 @@
   <p:extLst>
     <p:ext uri="{521415D9-36F7-43E2-AB2F-B90AF26B5E84}">
       <p14:sectionLst xmlns:p14="http://schemas.microsoft.com/office/powerpoint/2010/main">
-        <p14:section name="Opening" id="{b5ba9ae9-4e11-0f05-142f-fdbe4343a665}">
+        <p14:section name="Opening" id="{45c032f1-b3b5-ce11-8c02-fc2b3ec3312c}">
           <p14:sldIdLst>
             <p14:sldId id="256"/>
           </p14:sldIdLst>
         </p14:section>
-        <p14:section name="Gate" id="{644a4593-7da0-52a4-7f9e-9856df0665c1}">
+        <p14:section name="Gate" id="{e3bd7650-2972-9a5e-9b33-6b5f84c76fab}">
           <p14:sldIdLst>
             <p14:sldId id="257"/>
             <p14:sldId id="258"/>
           </p14:sldIdLst>
         </p14:section>
-        <p14:section name="Pre-teach" id="{0eac8ed8-6e33-288e-c00f-33f1eb3a32de}">
+        <p14:section name="Pre-teach" id="{b7c19b0f-f308-d1f8-0a6a-f81d95b22277}">
           <p14:sldIdLst>
             <p14:sldId id="259"/>
             <p14:sldId id="260"/>
           </p14:sldIdLst>
         </p14:section>
-        <p14:section name="Read-along" id="{2cb51c84-990f-6f77-0805-d4223d90311f}">
+        <p14:section name="Read-along" id="{e7af0263-f59c-ac09-cf40-45464efc67c3}">
           <p14:sldIdLst>
             <p14:sldId id="261"/>
             <p14:sldId id="262"/>
           </p14:sldIdLst>
         </p14:section>
-        <p14:section name="Teach" id="{0491a821-02d4-0232-7d63-b153df3da27f}">
+        <p14:section name="Teach" id="{5d95163c-465d-6f6f-6055-9ae9d64222d6}">
           <p14:sldIdLst>
             <p14:sldId id="263"/>
             <p14:sldId id="264"/>
@@ -158,7 +158,7 @@
             <p14:sldId id="267"/>
           </p14:sldIdLst>
         </p14:section>
-        <p14:section name="Routes" id="{3b5c18d1-abeb-f152-e976-7e11844284da}">
+        <p14:section name="Routes" id="{14ee7e75-3463-d19e-ae47-fa4b688fdb2b}">
           <p14:sldIdLst>
             <p14:sldId id="268"/>
             <p14:sldId id="269"/>
@@ -166,12 +166,12 @@
             <p14:sldId id="271"/>
           </p14:sldIdLst>
         </p14:section>
-        <p14:section name="Close" id="{43f63d59-c11a-f299-886a-a8f8295a853b}">
+        <p14:section name="Close" id="{f6cd10f8-6a8a-f334-8341-0be3eba670e8}">
           <p14:sldIdLst>
             <p14:sldId id="272"/>
           </p14:sldIdLst>
         </p14:section>
-        <p14:section name="Answers" id="{4471b309-6e85-2444-ecf6-464eca6c8f89}">
+        <p14:section name="Answers" id="{a965fc5d-57b1-ae7f-d1ae-a7896ff908ae}">
           <p14:sldIdLst>
             <p14:sldId id="273"/>
             <p14:sldId id="274"/>
